--- a/assets/pptx/catalog-783.pptx
+++ b/assets/pptx/catalog-783.pptx
@@ -3295,7 +3295,7 @@
                 <a:ea typeface="Ebrima"/>
                 <a:cs typeface="Ebrima"/>
               </a:rPr>
-              <a:t>ታሪኬን ለውጠህ ታዲያ ልበልህ እንጂ አንተ የኔ (2x)</a:t>
+              <a:t>ታሪኬን ለውጠህ ታዲያ ልበልህ እንጂ አንተ የኔ 2x</a:t>
             </a:r>
           </a:p>
           <a:p>
@@ -3313,7 +3313,7 @@
                 <a:ea typeface="Ebrima"/>
                 <a:cs typeface="Ebrima"/>
               </a:rPr>
-              <a:t>ማን ኧረ ማን ማን ይወስድብኛል አንተን ከኔ (2x)</a:t>
+              <a:t>ማን ኧረ ማን ማን ይወስድብኛል አንተን ከኔ 2x</a:t>
             </a:r>
           </a:p>
           <a:p>
@@ -3331,7 +3331,7 @@
                 <a:ea typeface="Ebrima"/>
                 <a:cs typeface="Ebrima"/>
               </a:rPr>
-              <a:t>ማን ኧረ ማን ማን ይወስድብኛል አንተን ከኔ (2x)</a:t>
+              <a:t>ማን ኧረ ማን ማን ይወስድብኛል አንተን ከኔ 2x</a:t>
             </a:r>
           </a:p>
           <a:p>
@@ -3457,7 +3457,7 @@
                 <a:ea typeface="Ebrima"/>
                 <a:cs typeface="Ebrima"/>
               </a:rPr>
-              <a:t>ታዲያ ታዲያ (2x)</a:t>
+              <a:t>ታዲያ ታዲያ 2x</a:t>
             </a:r>
           </a:p>
           <a:p>
@@ -3475,7 +3475,7 @@
                 <a:ea typeface="Ebrima"/>
                 <a:cs typeface="Ebrima"/>
               </a:rPr>
-              <a:t>እንደመሸ አይቀርም ለሊቱ ይነጋል (4x)</a:t>
+              <a:t>እንደመሸ አይቀርም ለሊቱ ይነጋል 4x</a:t>
             </a:r>
           </a:p>
           <a:p>
@@ -3565,7 +3565,7 @@
                 <a:ea typeface="Ebrima"/>
                 <a:cs typeface="Ebrima"/>
               </a:rPr>
-              <a:t>ውዴ የኔ ነው እኔም ደግሞ የእርሱ ነኝ የየሱስ ነኝ (2x)</a:t>
+              <a:t>ውዴ የኔ ነው እኔም ደግሞ የእርሱ ነኝ የየሱስ ነኝ 2x</a:t>
             </a:r>
           </a:p>
           <a:p>
@@ -3619,7 +3619,7 @@
                 <a:ea typeface="Ebrima"/>
                 <a:cs typeface="Ebrima"/>
               </a:rPr>
-              <a:t>ጊዜም ሁኔታም አይሽረዉም ለኔስ ኢየሱሴ ልዩ ነዉ ልዩ ነዉ (2x)</a:t>
+              <a:t>ጊዜም ሁኔታም አይሽረዉም ለኔስ ኢየሱሴ ልዩ ነዉ ልዩ ነዉ 2x</a:t>
             </a:r>
           </a:p>
           <a:p>
@@ -3673,7 +3673,7 @@
                 <a:ea typeface="Ebrima"/>
                 <a:cs typeface="Ebrima"/>
               </a:rPr>
-              <a:t>ታዲያ ታዲያ (2x)</a:t>
+              <a:t>ታዲያ ታዲያ 2x</a:t>
             </a:r>
           </a:p>
           <a:p>
@@ -3745,7 +3745,7 @@
                 <a:ea typeface="Ebrima"/>
                 <a:cs typeface="Ebrima"/>
               </a:rPr>
-              <a:t>ታሪኬን ለውጠህ ታዲያ ልበልህ እንጂ አንተ የኔ (2x)</a:t>
+              <a:t>ታሪኬን ለውጠህ ታዲያ ልበልህ እንጂ አንተ የኔ 2x</a:t>
             </a:r>
           </a:p>
           <a:p>
